--- a/dist/초3/수학/자연수계산/초3_수학_자연수계산_08_나머지가있는나눗셈_학생용.pptx
+++ b/dist/초3/수학/자연수계산/초3_수학_자연수계산_08_나머지가있는나눗셈_학생용.pptx
@@ -120,13 +120,13 @@
   <p:extLst>
     <p:ext uri="{521415D9-36F7-43E2-AB2F-B90AF26B5E84}">
       <p14:sectionLst xmlns:p14="http://schemas.microsoft.com/office/powerpoint/2010/main">
-        <p14:section name="도입" id="{686704c2-f9ee-6a60-5704-efaf95154cfc}">
+        <p14:section name="도입" id="{8c32520e-1e10-2bf7-54cd-f66fcf1ab7bb}">
           <p14:sldIdLst>
             <p14:sldId id="256"/>
             <p14:sldId id="257"/>
           </p14:sldIdLst>
         </p14:section>
-        <p14:section name="개념" id="{dea89253-6f69-0858-784a-206a19fc3cd2}">
+        <p14:section name="개념" id="{180f31f3-9138-6b25-22e6-e1a9dbbd271c}">
           <p14:sldIdLst>
             <p14:sldId id="258"/>
             <p14:sldId id="259"/>
@@ -135,31 +135,31 @@
             <p14:sldId id="263"/>
           </p14:sldIdLst>
         </p14:section>
-        <p14:section name="연습" id="{18343f9c-7b37-9de5-be47-f84aee7d8882}">
+        <p14:section name="연습" id="{49d5bc23-004b-850a-9189-1e9230cedbb5}">
           <p14:sldIdLst>
             <p14:sldId id="260"/>
             <p14:sldId id="264"/>
             <p14:sldId id="265"/>
           </p14:sldIdLst>
         </p14:section>
-        <p14:section name="개념" id="{209ffe49-657f-c91a-e515-31a12f8286f0}">
+        <p14:section name="개념" id="{0563571c-5920-83b0-1c04-6fb9998ff360}">
           <p14:sldIdLst/>
         </p14:section>
-        <p14:section name="연습" id="{66bcf5c3-372b-1dde-9922-d0aa8ad846d6}">
+        <p14:section name="연습" id="{02b045fd-decc-a4fd-58a6-9ecbf971efd7}">
           <p14:sldIdLst/>
         </p14:section>
-        <p14:section name="확인" id="{37e7df45-e42a-9a4d-f00a-94d76c2e6665}">
+        <p14:section name="확인" id="{5d7e4fab-9a3a-7dd8-afd1-eb1b34131485}">
           <p14:sldIdLst>
             <p14:sldId id="266"/>
             <p14:sldId id="267"/>
           </p14:sldIdLst>
         </p14:section>
-        <p14:section name="정리" id="{aa4d6b51-ccc3-ea85-7bdd-0f1d0be8ebfa}">
+        <p14:section name="정리" id="{bb76bb6d-34bb-8b77-ad11-8638dd8124f9}">
           <p14:sldIdLst>
             <p14:sldId id="268"/>
           </p14:sldIdLst>
         </p14:section>
-        <p14:section name="보충" id="{27b927e2-682b-7f49-c42f-420068d795a9}">
+        <p14:section name="보충" id="{0f2e82fe-e798-8987-92ab-ea58fb1100b0}">
           <p14:sldIdLst>
             <p14:sldId id="269"/>
           </p14:sldIdLst>
@@ -7733,7 +7733,7 @@
           </p:nvPr>
         </p:nvGraphicFramePr>
         <p:xfrm>
-          <a:off x="2253996" y="2245360"/>
+          <a:off x="2253996" y="2286635"/>
           <a:ext cx="7680960" cy="914400"/>
         </p:xfrm>
         <a:graphic>
@@ -7745,7 +7745,7 @@
                 <a:gridCol w="2560320"/>
                 <a:gridCol w="2560320"/>
               </a:tblGrid>
-              <a:tr h="528320">
+              <a:tr h="511810">
                 <a:tc>
                   <a:txBody>
                     <a:bodyPr/>
@@ -7951,7 +7951,7 @@
                   </a:tcPr>
                 </a:tc>
               </a:tr>
-              <a:tr h="528320">
+              <a:tr h="511810">
                 <a:tc>
                   <a:txBody>
                     <a:bodyPr/>
@@ -8157,7 +8157,7 @@
                   </a:tcPr>
                 </a:tc>
               </a:tr>
-              <a:tr h="528320">
+              <a:tr h="511810">
                 <a:tc>
                   <a:txBody>
                     <a:bodyPr/>
@@ -8363,7 +8363,7 @@
                   </a:tcPr>
                 </a:tc>
               </a:tr>
-              <a:tr h="528320">
+              <a:tr h="511810">
                 <a:tc>
                   <a:txBody>
                     <a:bodyPr/>
@@ -8569,7 +8569,7 @@
                   </a:tcPr>
                 </a:tc>
               </a:tr>
-              <a:tr h="528320">
+              <a:tr h="511810">
                 <a:tc>
                   <a:txBody>
                     <a:bodyPr/>
@@ -12473,7 +12473,7 @@
           </p:nvPr>
         </p:nvGraphicFramePr>
         <p:xfrm>
-          <a:off x="8047909" y="1374140"/>
+          <a:off x="8047909" y="1431925"/>
           <a:ext cx="3108960" cy="914400"/>
         </p:xfrm>
         <a:graphic>
@@ -12485,7 +12485,7 @@
                 <a:gridCol w="1036320"/>
                 <a:gridCol w="1036320"/>
               </a:tblGrid>
-              <a:tr h="528320">
+              <a:tr h="511810">
                 <a:tc>
                   <a:txBody>
                     <a:bodyPr/>
@@ -12680,7 +12680,7 @@
                   </a:tcPr>
                 </a:tc>
               </a:tr>
-              <a:tr h="528320">
+              <a:tr h="511810">
                 <a:tc>
                   <a:txBody>
                     <a:bodyPr/>
@@ -12875,7 +12875,7 @@
                   </a:tcPr>
                 </a:tc>
               </a:tr>
-              <a:tr h="528320">
+              <a:tr h="511810">
                 <a:tc>
                   <a:txBody>
                     <a:bodyPr/>
@@ -13081,7 +13081,7 @@
                   </a:tcPr>
                 </a:tc>
               </a:tr>
-              <a:tr h="528320">
+              <a:tr h="511810">
                 <a:tc>
                   <a:txBody>
                     <a:bodyPr/>
@@ -13265,7 +13265,7 @@
                   </a:tcPr>
                 </a:tc>
               </a:tr>
-              <a:tr h="528320">
+              <a:tr h="511810">
                 <a:tc>
                   <a:txBody>
                     <a:bodyPr/>
@@ -13460,7 +13460,7 @@
                   </a:tcPr>
                 </a:tc>
               </a:tr>
-              <a:tr h="528320">
+              <a:tr h="511810">
                 <a:tc>
                   <a:txBody>
                     <a:bodyPr/>
@@ -13655,7 +13655,7 @@
                   </a:tcPr>
                 </a:tc>
               </a:tr>
-              <a:tr h="528320">
+              <a:tr h="511810">
                 <a:tc>
                   <a:txBody>
                     <a:bodyPr/>
@@ -14364,7 +14364,7 @@
           </p:nvPr>
         </p:nvGraphicFramePr>
         <p:xfrm>
-          <a:off x="7587234" y="2287524"/>
+          <a:off x="7587234" y="2337054"/>
           <a:ext cx="2743200" cy="914400"/>
         </p:xfrm>
         <a:graphic>
@@ -14376,7 +14376,7 @@
                 <a:gridCol w="914400"/>
                 <a:gridCol w="914400"/>
               </a:tblGrid>
-              <a:tr h="528320">
+              <a:tr h="511810">
                 <a:tc>
                   <a:txBody>
                     <a:bodyPr/>
@@ -14571,7 +14571,7 @@
                   </a:tcPr>
                 </a:tc>
               </a:tr>
-              <a:tr h="528320">
+              <a:tr h="511810">
                 <a:tc>
                   <a:txBody>
                     <a:bodyPr/>
@@ -14777,7 +14777,7 @@
                   </a:tcPr>
                 </a:tc>
               </a:tr>
-              <a:tr h="528320">
+              <a:tr h="511810">
                 <a:tc>
                   <a:txBody>
                     <a:bodyPr/>
@@ -14961,7 +14961,7 @@
                   </a:tcPr>
                 </a:tc>
               </a:tr>
-              <a:tr h="528320">
+              <a:tr h="511810">
                 <a:tc>
                   <a:txBody>
                     <a:bodyPr/>
@@ -15156,7 +15156,7 @@
                   </a:tcPr>
                 </a:tc>
               </a:tr>
-              <a:tr h="528320">
+              <a:tr h="511810">
                 <a:tc>
                   <a:txBody>
                     <a:bodyPr/>
@@ -15351,7 +15351,7 @@
                   </a:tcPr>
                 </a:tc>
               </a:tr>
-              <a:tr h="528320">
+              <a:tr h="511810">
                 <a:tc>
                   <a:txBody>
                     <a:bodyPr/>

--- a/dist/초3/수학/자연수계산/초3_수학_자연수계산_08_나머지가있는나눗셈_학생용.pptx
+++ b/dist/초3/수학/자연수계산/초3_수학_자연수계산_08_나머지가있는나눗셈_학생용.pptx
@@ -120,13 +120,13 @@
   <p:extLst>
     <p:ext uri="{521415D9-36F7-43E2-AB2F-B90AF26B5E84}">
       <p14:sectionLst xmlns:p14="http://schemas.microsoft.com/office/powerpoint/2010/main">
-        <p14:section name="도입" id="{8c32520e-1e10-2bf7-54cd-f66fcf1ab7bb}">
+        <p14:section name="도입" id="{6e80e494-25e1-9159-a5c9-76acfb05ffd1}">
           <p14:sldIdLst>
             <p14:sldId id="256"/>
             <p14:sldId id="257"/>
           </p14:sldIdLst>
         </p14:section>
-        <p14:section name="개념" id="{180f31f3-9138-6b25-22e6-e1a9dbbd271c}">
+        <p14:section name="개념" id="{ec132cca-385a-9e3c-97b5-de93c201d7ea}">
           <p14:sldIdLst>
             <p14:sldId id="258"/>
             <p14:sldId id="259"/>
@@ -135,31 +135,31 @@
             <p14:sldId id="263"/>
           </p14:sldIdLst>
         </p14:section>
-        <p14:section name="연습" id="{49d5bc23-004b-850a-9189-1e9230cedbb5}">
+        <p14:section name="연습" id="{a8a2850a-606c-e3f0-fd41-73ef76404240}">
           <p14:sldIdLst>
             <p14:sldId id="260"/>
             <p14:sldId id="264"/>
             <p14:sldId id="265"/>
           </p14:sldIdLst>
         </p14:section>
-        <p14:section name="개념" id="{0563571c-5920-83b0-1c04-6fb9998ff360}">
+        <p14:section name="개념" id="{4c29ba2f-1afb-315e-c4ff-17f5e13c6ad4}">
           <p14:sldIdLst/>
         </p14:section>
-        <p14:section name="연습" id="{02b045fd-decc-a4fd-58a6-9ecbf971efd7}">
+        <p14:section name="연습" id="{03a52a92-5810-39cf-66ea-2f9e2af4e1c7}">
           <p14:sldIdLst/>
         </p14:section>
-        <p14:section name="확인" id="{5d7e4fab-9a3a-7dd8-afd1-eb1b34131485}">
+        <p14:section name="확인" id="{aa1eb89b-695b-e0ee-5bb2-f62e9c106801}">
           <p14:sldIdLst>
             <p14:sldId id="266"/>
             <p14:sldId id="267"/>
           </p14:sldIdLst>
         </p14:section>
-        <p14:section name="정리" id="{bb76bb6d-34bb-8b77-ad11-8638dd8124f9}">
+        <p14:section name="정리" id="{150bbc66-30b8-eb08-4677-f423667076bb}">
           <p14:sldIdLst>
             <p14:sldId id="268"/>
           </p14:sldIdLst>
         </p14:section>
-        <p14:section name="보충" id="{0f2e82fe-e798-8987-92ab-ea58fb1100b0}">
+        <p14:section name="보충" id="{479e33d0-f347-05ad-931c-9f927337e86c}">
           <p14:sldIdLst>
             <p14:sldId id="269"/>
           </p14:sldIdLst>
